--- a/mmacos/challenges/rodgers3/deck_rodgers3.pptx
+++ b/mmacos/challenges/rodgers3/deck_rodgers3.pptx
@@ -7628,7 +7628,7 @@
       </p:sp>
       <p:pic>
         <p:nvPicPr>
-          <p:cNvPr id="6" name="Picture 5" descr="t4_s5_layout.png"/>
+          <p:cNvPr id="6" name="Picture 5" descr="deck_t4_layout_isoside.png"/>
           <p:cNvPicPr>
             <a:picLocks noChangeAspect="1"/>
           </p:cNvPicPr>
@@ -7642,8 +7642,8 @@
         </p:blipFill>
         <p:spPr>
           <a:xfrm>
-            <a:off x="7469298" y="1298448"/>
-            <a:ext cx="3257962" cy="2806192"/>
+            <a:off x="6400800" y="1298448"/>
+            <a:ext cx="5394960" cy="2232314"/>
           </a:xfrm>
           <a:prstGeom prst="rect">
             <a:avLst/>
@@ -7658,7 +7658,7 @@
         </p:nvSpPr>
         <p:spPr>
           <a:xfrm>
-            <a:off x="6400800" y="4122927"/>
+            <a:off x="6400800" y="3549050"/>
             <a:ext cx="5394960" cy="394208"/>
           </a:xfrm>
           <a:prstGeom prst="rect">
@@ -7684,20 +7684,83 @@
                 </a:solidFill>
                 <a:latin typeface="Arial"/>
               </a:rPr>
-              <a:t>The second instrument at S5: the same five-stage flow, different parameters, clearances to its own spec.</a:t>
-            </a:r>
-          </a:p>
-        </p:txBody>
-      </p:sp>
-      <p:sp>
-        <p:nvSpPr>
-          <p:cNvPr id="8" name="TextBox 7"/>
+              <a:t>The second instrument at S5 (iso + side): the same five-stage flow at different parameters.</a:t>
+            </a:r>
+          </a:p>
+        </p:txBody>
+      </p:sp>
+      <p:pic>
+        <p:nvPicPr>
+          <p:cNvPr id="8" name="Picture 7" descr="t4_s5_fields.png"/>
+          <p:cNvPicPr>
+            <a:picLocks noChangeAspect="1"/>
+          </p:cNvPicPr>
+          <p:nvPr/>
+        </p:nvPicPr>
+        <p:blipFill>
+          <a:blip r:embed="rId3"/>
+          <a:stretch>
+            <a:fillRect/>
+          </a:stretch>
+        </p:blipFill>
+        <p:spPr>
+          <a:xfrm>
+            <a:off x="7872277" y="3979834"/>
+            <a:ext cx="2452005" cy="1708912"/>
+          </a:xfrm>
+          <a:prstGeom prst="rect">
+            <a:avLst/>
+          </a:prstGeom>
+        </p:spPr>
+      </p:pic>
+      <p:sp>
+        <p:nvSpPr>
+          <p:cNvPr id="9" name="TextBox 8"/>
           <p:cNvSpPr txBox="1"/>
           <p:nvPr/>
         </p:nvSpPr>
         <p:spPr>
           <a:xfrm>
-            <a:off x="6400800" y="4553712"/>
+            <a:off x="6400800" y="5707034"/>
+            <a:ext cx="5394960" cy="394208"/>
+          </a:xfrm>
+          <a:prstGeom prst="rect">
+            <a:avLst/>
+          </a:prstGeom>
+          <a:noFill/>
+        </p:spPr>
+        <p:txBody>
+          <a:bodyPr wrap="square">
+            <a:spAutoFit/>
+          </a:bodyPr>
+          <a:lstStyle/>
+          <a:p>
+            <a:pPr algn="ctr">
+              <a:spcAft>
+                <a:spcPts val="0"/>
+              </a:spcAft>
+            </a:pPr>
+            <a:r>
+              <a:rPr sz="1000" b="0">
+                <a:solidFill>
+                  <a:srgbClr val="6E6E6E"/>
+                </a:solidFill>
+                <a:latin typeface="Arial"/>
+              </a:rPr>
+              <a:t>S5 field envelopes: centre + YAN-extreme beams clear every mirror at the instrument's own 10/5 mm spec.</a:t>
+            </a:r>
+          </a:p>
+        </p:txBody>
+      </p:sp>
+      <p:sp>
+        <p:nvSpPr>
+          <p:cNvPr id="10" name="TextBox 9"/>
+          <p:cNvSpPr txBox="1"/>
+          <p:nvPr/>
+        </p:nvSpPr>
+        <p:spPr>
+          <a:xfrm>
+            <a:off x="6400800" y="6137818"/>
             <a:ext cx="5394960" cy="274320"/>
           </a:xfrm>
           <a:prstGeom prst="rect">
@@ -7723,7 +7786,7 @@
                 </a:solidFill>
                 <a:latin typeface="Arial"/>
               </a:rPr>
-              <a:t>strict RMS WFE, centroid reference on the stage's frozen focal plane, exit-pupil anchor, piston-only removal; quoted statistic = dense 11x11 map MAXIMUM over the field box (this instrument's box).  Reproduce: rodgers3() — the Stage-0 gates; oi_story(...) — ladder + counters + this deck's numbers; suites tRodgers3 + tOffsetImager.  Written record: challenges/rodgers3/PACKET.md.</a:t>
+              <a:t>strict RMS WFE, centroid reference on the stage's frozen focal plane, exit-pupil anchor, piston-only removal; quoted statistic = dense 11x11 map MAXIMUM over the field box (this instrument's box).  Reproduce: rodgers3() = the Stage-0 gates, oi_story(...) = ladder + counters; record: challenges/rodgers3/PACKET.md.</a:t>
             </a:r>
           </a:p>
         </p:txBody>

--- a/mmacos/challenges/rodgers3/deck_rodgers3.pptx
+++ b/mmacos/challenges/rodgers3/deck_rodgers3.pptx
@@ -6387,7 +6387,7 @@
                 </a:solidFill>
                 <a:latin typeface="Arial"/>
               </a:rPr>
-              <a:t>strict RMS WFE, centroid reference on the stage's frozen focal plane, exit-pupil anchor, piston-only removal; quoted statistic = dense 11x11 map MAXIMUM over the field box.</a:t>
+              <a:t>strict RMS WFE, centroid reference on the stage's frozen focal plane, exit-pupil anchor, piston-only removal; quoted statistic = dense 11x11 map MAXIMUM over the field box.  The 34.1 mm floor is CONFIRMED at fine sampling under the fixed clearance measure (packet addendum); the truer convex-hull glass model reads the same design at 42.0 mm — comfortably inside the stated 35.</a:t>
             </a:r>
           </a:p>
         </p:txBody>
@@ -6444,7 +6444,7 @@
                 </a:solidFill>
                 <a:latin typeface="Arial"/>
               </a:rPr>
-              <a:t>6 — Stage 5, the honest rung</a:t>
+              <a:t>6 — Stage 5: diagnosed, then beaten</a:t>
             </a:r>
           </a:p>
           <a:p>
@@ -6460,7 +6460,7 @@
                 </a:solidFill>
                 <a:latin typeface="Arial"/>
               </a:rPr>
-              <a:t>118.2 nm vs the reported 53 — a solver-budget gap, not physics</a:t>
+              <a:t>The gap to the reported 53 was the solve-field count; matching it lands 45.4 nm</a:t>
             </a:r>
           </a:p>
         </p:txBody>
@@ -6543,7 +6543,7 @@
                 </a:solidFill>
                 <a:latin typeface="Arial"/>
               </a:rPr>
-              <a:t>•  Adding the Zernike basis (the source study's own varied term set, 82 variables) under the clearance rows moves the ladder 113.6 to 118.2 nm: the stage stalls at its S4 level.  The min-rule branch value is 113.6.</a:t>
+              <a:t>•  The five-stage run closes S5 at 118.2 nm — stalled at its S4 level, with 82 Zernike variables against only 9 solve fields (the dense map is scored on 121 points; the solve set is what the optimizer sees).</a:t>
             </a:r>
           </a:p>
           <a:p>
@@ -6559,7 +6559,7 @@
                 </a:solidFill>
                 <a:latin typeface="Arial"/>
               </a:rPr>
-              <a:t>•  The budget: a 3x3 solve grid and a 30-iteration cap against 82 variables plus the constraint rows.  The stage is convergence-limited — the gap to the reported 53 (2.2x) is solver budget, not convention, and one long-budget run is the named follow-on.</a:t>
+              <a:t>•  The controlled probes, all from the same S4 state: 150 iterations at 9 fields reach 110.7 nm — iterations are NOT the gap.  25 solve fields at 60 iterations reach 54.1 — the field count is.  Nine fields under-determine 82 variables: the solve set converges while the dense map stalls.</a:t>
             </a:r>
           </a:p>
           <a:p>
@@ -6575,7 +6575,7 @@
                 </a:solidFill>
                 <a:latin typeface="Arial"/>
               </a:rPr>
-              <a:t>•  The term set is not the limit — slide 7, counter (b).</a:t>
+              <a:t>•  With 25 fields AND the corrected clearance rows (slide 8): 45.4 nm at a 33.4 mm floor — 0.86x the reported 53, exit pin held to 0.008°.</a:t>
             </a:r>
           </a:p>
         </p:txBody>
@@ -6596,8 +6596,8 @@
         </p:blipFill>
         <p:spPr>
           <a:xfrm>
-            <a:off x="7313287" y="1298448"/>
-            <a:ext cx="3569984" cy="3062732"/>
+            <a:off x="7931773" y="1298448"/>
+            <a:ext cx="2333013" cy="2001520"/>
           </a:xfrm>
           <a:prstGeom prst="rect">
             <a:avLst/>
@@ -6612,8 +6612,8 @@
         </p:nvSpPr>
         <p:spPr>
           <a:xfrm>
-            <a:off x="6400800" y="4379467"/>
-            <a:ext cx="5394960" cy="229107"/>
+            <a:off x="6400800" y="3318256"/>
+            <a:ext cx="5394960" cy="394208"/>
           </a:xfrm>
           <a:prstGeom prst="rect">
             <a:avLst/>
@@ -6638,20 +6638,83 @@
                 </a:solidFill>
                 <a:latin typeface="Arial"/>
               </a:rPr>
-              <a:t>S5 map: 118.2 nm max; clearance floor 34.6 mm (PASS).</a:t>
-            </a:r>
-          </a:p>
-        </p:txBody>
-      </p:sp>
-      <p:sp>
-        <p:nvSpPr>
-          <p:cNvPr id="7" name="TextBox 6"/>
+              <a:t>The five-stage S5 of record: 118.2 nm.  Its recorded 34.6 mm floor corrects to 30.0 mm under the fixed clearance measure (packet addendum).</a:t>
+            </a:r>
+          </a:p>
+        </p:txBody>
+      </p:sp>
+      <p:pic>
+        <p:nvPicPr>
+          <p:cNvPr id="7" name="Picture 6" descr="s5b_legC_map.png"/>
+          <p:cNvPicPr>
+            <a:picLocks noChangeAspect="1"/>
+          </p:cNvPicPr>
+          <p:nvPr/>
+        </p:nvPicPr>
+        <p:blipFill>
+          <a:blip r:embed="rId3"/>
+          <a:stretch>
+            <a:fillRect/>
+          </a:stretch>
+        </p:blipFill>
+        <p:spPr>
+          <a:xfrm>
+            <a:off x="7862735" y="3749040"/>
+            <a:ext cx="2471088" cy="2166620"/>
+          </a:xfrm>
+          <a:prstGeom prst="rect">
+            <a:avLst/>
+          </a:prstGeom>
+        </p:spPr>
+      </p:pic>
+      <p:sp>
+        <p:nvSpPr>
+          <p:cNvPr id="8" name="TextBox 7"/>
           <p:cNvSpPr txBox="1"/>
           <p:nvPr/>
         </p:nvSpPr>
         <p:spPr>
           <a:xfrm>
-            <a:off x="6400800" y="4645151"/>
+            <a:off x="6400800" y="5933948"/>
+            <a:ext cx="5394960" cy="229107"/>
+          </a:xfrm>
+          <a:prstGeom prst="rect">
+            <a:avLst/>
+          </a:prstGeom>
+          <a:noFill/>
+        </p:spPr>
+        <p:txBody>
+          <a:bodyPr wrap="square">
+            <a:spAutoFit/>
+          </a:bodyPr>
+          <a:lstStyle/>
+          <a:p>
+            <a:pPr algn="ctr">
+              <a:spcAft>
+                <a:spcPts val="0"/>
+              </a:spcAft>
+            </a:pPr>
+            <a:r>
+              <a:rPr sz="1000" b="0">
+                <a:solidFill>
+                  <a:srgbClr val="6E6E6E"/>
+                </a:solidFill>
+                <a:latin typeface="Arial"/>
+              </a:rPr>
+              <a:t>The honest re-solve: 45.4 nm max, true floor 33.4 mm.</a:t>
+            </a:r>
+          </a:p>
+        </p:txBody>
+      </p:sp>
+      <p:sp>
+        <p:nvSpPr>
+          <p:cNvPr id="9" name="TextBox 8"/>
+          <p:cNvSpPr txBox="1"/>
+          <p:nvPr/>
+        </p:nvSpPr>
+        <p:spPr>
+          <a:xfrm>
+            <a:off x="6400800" y="6199632"/>
             <a:ext cx="5394960" cy="274320"/>
           </a:xfrm>
           <a:prstGeom prst="rect">
@@ -7071,7 +7134,7 @@
                 </a:solidFill>
                 <a:latin typeface="Arial"/>
               </a:rPr>
-              <a:t>8 — The same template on a second instrument</a:t>
+              <a:t>8 — What carried, what taught</a:t>
             </a:r>
           </a:p>
           <a:p>
@@ -7087,7 +7150,7 @@
                 </a:solidFill>
                 <a:latin typeface="Arial"/>
               </a:rPr>
-              <a:t>EPD 200 mm, F/2.5, 10°x10° at 12°, its own 10/5 mm clearance spec: every stage gates</a:t>
+              <a:t>The layout figure that said no — and the constraint-model fixes it forced</a:t>
             </a:r>
           </a:p>
         </p:txBody>
@@ -7136,450 +7199,15 @@
           </a:p>
         </p:txBody>
       </p:sp>
-      <p:graphicFrame>
-        <p:nvGraphicFramePr>
-          <p:cNvPr id="4" name="Table 3"/>
-          <p:cNvGraphicFramePr>
-            <a:graphicFrameLocks noGrp="1"/>
-          </p:cNvGraphicFramePr>
-          <p:nvPr/>
-        </p:nvGraphicFramePr>
-        <p:xfrm>
-          <a:off x="411480" y="1298448"/>
-          <a:ext cx="5806439" cy="1680210"/>
-        </p:xfrm>
-        <a:graphic>
-          <a:graphicData uri="http://schemas.openxmlformats.org/drawingml/2006/table">
-            <a:tbl>
-              <a:tblPr firstRow="1" bandRow="1">
-                <a:tableStyleId>{5C22544A-7EE6-4342-B048-85BDC9FD1C3A}</a:tableStyleId>
-              </a:tblPr>
-              <a:tblGrid>
-                <a:gridCol w="936522"/>
-                <a:gridCol w="2247654"/>
-                <a:gridCol w="2622263"/>
-              </a:tblGrid>
-              <a:tr h="280035">
-                <a:tc>
-                  <a:txBody>
-                    <a:bodyPr wrap="square"/>
-                    <a:lstStyle/>
-                    <a:p>
-                      <a:r>
-                        <a:rPr sz="1100" b="1">
-                          <a:solidFill>
-                            <a:srgbClr val="FFFFFF"/>
-                          </a:solidFill>
-                          <a:latin typeface="Arial"/>
-                        </a:rPr>
-                        <a:t>stage</a:t>
-                      </a:r>
-                    </a:p>
-                  </a:txBody>
-                  <a:tcPr marL="54864" marR="54864" marT="18288" marB="18288">
-                    <a:solidFill>
-                      <a:srgbClr val="1F4E79"/>
-                    </a:solidFill>
-                  </a:tcPr>
-                </a:tc>
-                <a:tc>
-                  <a:txBody>
-                    <a:bodyPr wrap="square"/>
-                    <a:lstStyle/>
-                    <a:p>
-                      <a:r>
-                        <a:rPr sz="1100" b="1">
-                          <a:solidFill>
-                            <a:srgbClr val="FFFFFF"/>
-                          </a:solidFill>
-                          <a:latin typeface="Arial"/>
-                        </a:rPr>
-                        <a:t>map max (nm)</a:t>
-                      </a:r>
-                    </a:p>
-                  </a:txBody>
-                  <a:tcPr marL="54864" marR="54864" marT="18288" marB="18288">
-                    <a:solidFill>
-                      <a:srgbClr val="1F4E79"/>
-                    </a:solidFill>
-                  </a:tcPr>
-                </a:tc>
-                <a:tc>
-                  <a:txBody>
-                    <a:bodyPr wrap="square"/>
-                    <a:lstStyle/>
-                    <a:p>
-                      <a:r>
-                        <a:rPr sz="1100" b="1">
-                          <a:solidFill>
-                            <a:srgbClr val="FFFFFF"/>
-                          </a:solidFill>
-                          <a:latin typeface="Arial"/>
-                        </a:rPr>
-                        <a:t>clearance (mm)</a:t>
-                      </a:r>
-                    </a:p>
-                  </a:txBody>
-                  <a:tcPr marL="54864" marR="54864" marT="18288" marB="18288">
-                    <a:solidFill>
-                      <a:srgbClr val="1F4E79"/>
-                    </a:solidFill>
-                  </a:tcPr>
-                </a:tc>
-              </a:tr>
-              <a:tr h="280035">
-                <a:tc>
-                  <a:txBody>
-                    <a:bodyPr wrap="square"/>
-                    <a:lstStyle/>
-                    <a:p>
-                      <a:r>
-                        <a:rPr sz="1100" b="0">
-                          <a:solidFill>
-                            <a:srgbClr val="282828"/>
-                          </a:solidFill>
-                          <a:latin typeface="Arial"/>
-                        </a:rPr>
-                        <a:t>S1</a:t>
-                      </a:r>
-                    </a:p>
-                  </a:txBody>
-                  <a:tcPr marL="54864" marR="54864" marT="18288" marB="18288">
-                    <a:solidFill>
-                      <a:srgbClr val="FFFFFF"/>
-                    </a:solidFill>
-                  </a:tcPr>
-                </a:tc>
-                <a:tc>
-                  <a:txBody>
-                    <a:bodyPr wrap="square"/>
-                    <a:lstStyle/>
-                    <a:p>
-                      <a:r>
-                        <a:rPr sz="1100" b="0">
-                          <a:solidFill>
-                            <a:srgbClr val="282828"/>
-                          </a:solidFill>
-                          <a:latin typeface="Arial"/>
-                        </a:rPr>
-                        <a:t>30.0</a:t>
-                      </a:r>
-                    </a:p>
-                  </a:txBody>
-                  <a:tcPr marL="54864" marR="54864" marT="18288" marB="18288">
-                    <a:solidFill>
-                      <a:srgbClr val="FFFFFF"/>
-                    </a:solidFill>
-                  </a:tcPr>
-                </a:tc>
-                <a:tc>
-                  <a:txBody>
-                    <a:bodyPr wrap="square"/>
-                    <a:lstStyle/>
-                    <a:p>
-                      <a:r>
-                        <a:rPr sz="1100" b="0">
-                          <a:solidFill>
-                            <a:srgbClr val="282828"/>
-                          </a:solidFill>
-                          <a:latin typeface="Arial"/>
-                        </a:rPr>
-                        <a:t>9.5</a:t>
-                      </a:r>
-                    </a:p>
-                  </a:txBody>
-                  <a:tcPr marL="54864" marR="54864" marT="18288" marB="18288">
-                    <a:solidFill>
-                      <a:srgbClr val="FFFFFF"/>
-                    </a:solidFill>
-                  </a:tcPr>
-                </a:tc>
-              </a:tr>
-              <a:tr h="280035">
-                <a:tc>
-                  <a:txBody>
-                    <a:bodyPr wrap="square"/>
-                    <a:lstStyle/>
-                    <a:p>
-                      <a:r>
-                        <a:rPr sz="1100" b="0">
-                          <a:solidFill>
-                            <a:srgbClr val="282828"/>
-                          </a:solidFill>
-                          <a:latin typeface="Arial"/>
-                        </a:rPr>
-                        <a:t>S2</a:t>
-                      </a:r>
-                    </a:p>
-                  </a:txBody>
-                  <a:tcPr marL="54864" marR="54864" marT="18288" marB="18288">
-                    <a:solidFill>
-                      <a:srgbClr val="ECF1F6"/>
-                    </a:solidFill>
-                  </a:tcPr>
-                </a:tc>
-                <a:tc>
-                  <a:txBody>
-                    <a:bodyPr wrap="square"/>
-                    <a:lstStyle/>
-                    <a:p>
-                      <a:r>
-                        <a:rPr sz="1100" b="0">
-                          <a:solidFill>
-                            <a:srgbClr val="282828"/>
-                          </a:solidFill>
-                          <a:latin typeface="Arial"/>
-                        </a:rPr>
-                        <a:t>942.1</a:t>
-                      </a:r>
-                    </a:p>
-                  </a:txBody>
-                  <a:tcPr marL="54864" marR="54864" marT="18288" marB="18288">
-                    <a:solidFill>
-                      <a:srgbClr val="ECF1F6"/>
-                    </a:solidFill>
-                  </a:tcPr>
-                </a:tc>
-                <a:tc>
-                  <a:txBody>
-                    <a:bodyPr wrap="square"/>
-                    <a:lstStyle/>
-                    <a:p>
-                      <a:r>
-                        <a:rPr sz="1100" b="0">
-                          <a:solidFill>
-                            <a:srgbClr val="282828"/>
-                          </a:solidFill>
-                          <a:latin typeface="Arial"/>
-                        </a:rPr>
-                        <a:t>9.7</a:t>
-                      </a:r>
-                    </a:p>
-                  </a:txBody>
-                  <a:tcPr marL="54864" marR="54864" marT="18288" marB="18288">
-                    <a:solidFill>
-                      <a:srgbClr val="ECF1F6"/>
-                    </a:solidFill>
-                  </a:tcPr>
-                </a:tc>
-              </a:tr>
-              <a:tr h="280035">
-                <a:tc>
-                  <a:txBody>
-                    <a:bodyPr wrap="square"/>
-                    <a:lstStyle/>
-                    <a:p>
-                      <a:r>
-                        <a:rPr sz="1100" b="0">
-                          <a:solidFill>
-                            <a:srgbClr val="282828"/>
-                          </a:solidFill>
-                          <a:latin typeface="Arial"/>
-                        </a:rPr>
-                        <a:t>S3</a:t>
-                      </a:r>
-                    </a:p>
-                  </a:txBody>
-                  <a:tcPr marL="54864" marR="54864" marT="18288" marB="18288">
-                    <a:solidFill>
-                      <a:srgbClr val="FFFFFF"/>
-                    </a:solidFill>
-                  </a:tcPr>
-                </a:tc>
-                <a:tc>
-                  <a:txBody>
-                    <a:bodyPr wrap="square"/>
-                    <a:lstStyle/>
-                    <a:p>
-                      <a:r>
-                        <a:rPr sz="1100" b="0">
-                          <a:solidFill>
-                            <a:srgbClr val="282828"/>
-                          </a:solidFill>
-                          <a:latin typeface="Arial"/>
-                        </a:rPr>
-                        <a:t>173.6</a:t>
-                      </a:r>
-                    </a:p>
-                  </a:txBody>
-                  <a:tcPr marL="54864" marR="54864" marT="18288" marB="18288">
-                    <a:solidFill>
-                      <a:srgbClr val="FFFFFF"/>
-                    </a:solidFill>
-                  </a:tcPr>
-                </a:tc>
-                <a:tc>
-                  <a:txBody>
-                    <a:bodyPr wrap="square"/>
-                    <a:lstStyle/>
-                    <a:p>
-                      <a:r>
-                        <a:rPr sz="1100" b="0">
-                          <a:solidFill>
-                            <a:srgbClr val="282828"/>
-                          </a:solidFill>
-                          <a:latin typeface="Arial"/>
-                        </a:rPr>
-                        <a:t>9.8</a:t>
-                      </a:r>
-                    </a:p>
-                  </a:txBody>
-                  <a:tcPr marL="54864" marR="54864" marT="18288" marB="18288">
-                    <a:solidFill>
-                      <a:srgbClr val="FFFFFF"/>
-                    </a:solidFill>
-                  </a:tcPr>
-                </a:tc>
-              </a:tr>
-              <a:tr h="280035">
-                <a:tc>
-                  <a:txBody>
-                    <a:bodyPr wrap="square"/>
-                    <a:lstStyle/>
-                    <a:p>
-                      <a:r>
-                        <a:rPr sz="1100" b="0">
-                          <a:solidFill>
-                            <a:srgbClr val="282828"/>
-                          </a:solidFill>
-                          <a:latin typeface="Arial"/>
-                        </a:rPr>
-                        <a:t>S4</a:t>
-                      </a:r>
-                    </a:p>
-                  </a:txBody>
-                  <a:tcPr marL="54864" marR="54864" marT="18288" marB="18288">
-                    <a:solidFill>
-                      <a:srgbClr val="ECF1F6"/>
-                    </a:solidFill>
-                  </a:tcPr>
-                </a:tc>
-                <a:tc>
-                  <a:txBody>
-                    <a:bodyPr wrap="square"/>
-                    <a:lstStyle/>
-                    <a:p>
-                      <a:r>
-                        <a:rPr sz="1100" b="0">
-                          <a:solidFill>
-                            <a:srgbClr val="282828"/>
-                          </a:solidFill>
-                          <a:latin typeface="Arial"/>
-                        </a:rPr>
-                        <a:t>81.9</a:t>
-                      </a:r>
-                    </a:p>
-                  </a:txBody>
-                  <a:tcPr marL="54864" marR="54864" marT="18288" marB="18288">
-                    <a:solidFill>
-                      <a:srgbClr val="ECF1F6"/>
-                    </a:solidFill>
-                  </a:tcPr>
-                </a:tc>
-                <a:tc>
-                  <a:txBody>
-                    <a:bodyPr wrap="square"/>
-                    <a:lstStyle/>
-                    <a:p>
-                      <a:r>
-                        <a:rPr sz="1100" b="0">
-                          <a:solidFill>
-                            <a:srgbClr val="282828"/>
-                          </a:solidFill>
-                          <a:latin typeface="Arial"/>
-                        </a:rPr>
-                        <a:t>6.8</a:t>
-                      </a:r>
-                    </a:p>
-                  </a:txBody>
-                  <a:tcPr marL="54864" marR="54864" marT="18288" marB="18288">
-                    <a:solidFill>
-                      <a:srgbClr val="ECF1F6"/>
-                    </a:solidFill>
-                  </a:tcPr>
-                </a:tc>
-              </a:tr>
-              <a:tr h="280035">
-                <a:tc>
-                  <a:txBody>
-                    <a:bodyPr wrap="square"/>
-                    <a:lstStyle/>
-                    <a:p>
-                      <a:r>
-                        <a:rPr sz="1100" b="0">
-                          <a:solidFill>
-                            <a:srgbClr val="282828"/>
-                          </a:solidFill>
-                          <a:latin typeface="Arial"/>
-                        </a:rPr>
-                        <a:t>S5</a:t>
-                      </a:r>
-                    </a:p>
-                  </a:txBody>
-                  <a:tcPr marL="54864" marR="54864" marT="18288" marB="18288">
-                    <a:solidFill>
-                      <a:srgbClr val="FFFFFF"/>
-                    </a:solidFill>
-                  </a:tcPr>
-                </a:tc>
-                <a:tc>
-                  <a:txBody>
-                    <a:bodyPr wrap="square"/>
-                    <a:lstStyle/>
-                    <a:p>
-                      <a:r>
-                        <a:rPr sz="1100" b="0">
-                          <a:solidFill>
-                            <a:srgbClr val="282828"/>
-                          </a:solidFill>
-                          <a:latin typeface="Arial"/>
-                        </a:rPr>
-                        <a:t>40.5</a:t>
-                      </a:r>
-                    </a:p>
-                  </a:txBody>
-                  <a:tcPr marL="54864" marR="54864" marT="18288" marB="18288">
-                    <a:solidFill>
-                      <a:srgbClr val="FFFFFF"/>
-                    </a:solidFill>
-                  </a:tcPr>
-                </a:tc>
-                <a:tc>
-                  <a:txBody>
-                    <a:bodyPr wrap="square"/>
-                    <a:lstStyle/>
-                    <a:p>
-                      <a:r>
-                        <a:rPr sz="1100" b="0">
-                          <a:solidFill>
-                            <a:srgbClr val="282828"/>
-                          </a:solidFill>
-                          <a:latin typeface="Arial"/>
-                        </a:rPr>
-                        <a:t>7.9</a:t>
-                      </a:r>
-                    </a:p>
-                  </a:txBody>
-                  <a:tcPr marL="54864" marR="54864" marT="18288" marB="18288">
-                    <a:solidFill>
-                      <a:srgbClr val="FFFFFF"/>
-                    </a:solidFill>
-                  </a:tcPr>
-                </a:tc>
-              </a:tr>
-            </a:tbl>
-          </a:graphicData>
-        </a:graphic>
-      </p:graphicFrame>
-      <p:sp>
-        <p:nvSpPr>
-          <p:cNvPr id="5" name="TextBox 4"/>
+      <p:sp>
+        <p:nvSpPr>
+          <p:cNvPr id="4" name="TextBox 3"/>
           <p:cNvSpPr txBox="1"/>
           <p:nvPr/>
         </p:nvSpPr>
         <p:spPr>
           <a:xfrm>
-            <a:off x="411480" y="3124962"/>
+            <a:off x="411480" y="1298448"/>
             <a:ext cx="5806440" cy="274320"/>
           </a:xfrm>
           <a:prstGeom prst="rect">
@@ -7605,7 +7233,7 @@
                 </a:solidFill>
                 <a:latin typeface="Arial"/>
               </a:rPr>
-              <a:t>•  What carried: per-ray Gauss–Newton residuals (per-field-RMS residuals stall); first-order identities re-derived, never penalized; stop decenter as the exit-aiming variable; clearances as hinge rows in the solve; negative controls with teeth at every decode.</a:t>
+              <a:t>•  What carried: per-ray Gauss–Newton residuals (per-field-RMS residuals stall); first-order identities re-derived, never penalized; stop decenter as the exit-aiming variable; clearances as residual rows in the solve; negative controls with teeth at every decode; a solve set sized to the variable count (slide 6).</a:t>
             </a:r>
           </a:p>
           <a:p>
@@ -7621,14 +7249,30 @@
                 </a:solidFill>
                 <a:latin typeface="Arial"/>
               </a:rPr>
-              <a:t>•  What taught: clearance judged at the box centre misses edge-field blockage — evaluate over the field; a boolean constraint wall freezes a non-compliant start (hinge rows do not); stations are not spacings — a transcription slip briefly suggested F/4.95, and the runner now reads packaging from the .seq truth file so the comparison cannot drift that way again.</a:t>
+              <a:t>•  What taught: the beam-clearance measure must test PIERCING exactly and go NEGATIVE inside the glass — a sampled minimum reported millimetres of clearance for beams THROUGH a mirror, and a zero-at-contact measure gives the optimizer no way out; clearance judged at the box centre misses edge-field blockage — evaluate over the field; buildability constrains the FIELD CHOICE, not just the surfaces (no envelope of this family packages a 200 mm F/2.5 beam at a 12° offset — the field walk cannot separate the fans); stations are not spacings (the F/4.95 misread, retracted; packaging reads from the .seq truth file).</a:t>
+            </a:r>
+          </a:p>
+          <a:p>
+            <a:pPr>
+              <a:spcAft>
+                <a:spcPts val="600"/>
+              </a:spcAft>
+            </a:pPr>
+            <a:r>
+              <a:rPr sz="1200" b="0">
+                <a:solidFill>
+                  <a:srgbClr val="282828"/>
+                </a:solidFill>
+                <a:latin typeface="Arial"/>
+              </a:rPr>
+              <a:t>•  The second instrument (EPD 200 mm, F/2.5) exposed all of it and is retired for re-instancing; its layout figure — not a number — is what caught the defect.</a:t>
             </a:r>
           </a:p>
         </p:txBody>
       </p:sp>
       <p:pic>
         <p:nvPicPr>
-          <p:cNvPr id="6" name="Picture 5" descr="deck_t4_layout_isoside.png"/>
+          <p:cNvPr id="5" name="Picture 4" descr="t4_s5_fields.png"/>
           <p:cNvPicPr>
             <a:picLocks noChangeAspect="1"/>
           </p:cNvPicPr>
@@ -7642,8 +7286,8 @@
         </p:blipFill>
         <p:spPr>
           <a:xfrm>
-            <a:off x="6400800" y="1298448"/>
-            <a:ext cx="5394960" cy="2232314"/>
+            <a:off x="6494664" y="1298448"/>
+            <a:ext cx="5207231" cy="3629152"/>
           </a:xfrm>
           <a:prstGeom prst="rect">
             <a:avLst/>
@@ -7652,13 +7296,13 @@
       </p:pic>
       <p:sp>
         <p:nvSpPr>
-          <p:cNvPr id="7" name="TextBox 6"/>
+          <p:cNvPr id="6" name="TextBox 5"/>
           <p:cNvSpPr txBox="1"/>
           <p:nvPr/>
         </p:nvSpPr>
         <p:spPr>
           <a:xfrm>
-            <a:off x="6400800" y="3549050"/>
+            <a:off x="6400800" y="4945888"/>
             <a:ext cx="5394960" cy="394208"/>
           </a:xfrm>
           <a:prstGeom prst="rect">
@@ -7684,83 +7328,20 @@
                 </a:solidFill>
                 <a:latin typeface="Arial"/>
               </a:rPr>
-              <a:t>The second instrument at S5 (iso + side): the same five-stage flow at different parameters.</a:t>
-            </a:r>
-          </a:p>
-        </p:txBody>
-      </p:sp>
-      <p:pic>
-        <p:nvPicPr>
-          <p:cNvPr id="8" name="Picture 7" descr="t4_s5_fields.png"/>
-          <p:cNvPicPr>
-            <a:picLocks noChangeAspect="1"/>
-          </p:cNvPicPr>
-          <p:nvPr/>
-        </p:nvPicPr>
-        <p:blipFill>
-          <a:blip r:embed="rId3"/>
-          <a:stretch>
-            <a:fillRect/>
-          </a:stretch>
-        </p:blipFill>
-        <p:spPr>
-          <a:xfrm>
-            <a:off x="7872277" y="3979834"/>
-            <a:ext cx="2452005" cy="1708912"/>
-          </a:xfrm>
-          <a:prstGeom prst="rect">
-            <a:avLst/>
-          </a:prstGeom>
-        </p:spPr>
-      </p:pic>
-      <p:sp>
-        <p:nvSpPr>
-          <p:cNvPr id="9" name="TextBox 8"/>
+              <a:t>The figure that caught it: the second instrument's beams thread M1 and M2 while the sampled gate reported PASS.  Hardware drawings are gates, not illustrations.</a:t>
+            </a:r>
+          </a:p>
+        </p:txBody>
+      </p:sp>
+      <p:sp>
+        <p:nvSpPr>
+          <p:cNvPr id="7" name="TextBox 6"/>
           <p:cNvSpPr txBox="1"/>
           <p:nvPr/>
         </p:nvSpPr>
         <p:spPr>
           <a:xfrm>
-            <a:off x="6400800" y="5707034"/>
-            <a:ext cx="5394960" cy="394208"/>
-          </a:xfrm>
-          <a:prstGeom prst="rect">
-            <a:avLst/>
-          </a:prstGeom>
-          <a:noFill/>
-        </p:spPr>
-        <p:txBody>
-          <a:bodyPr wrap="square">
-            <a:spAutoFit/>
-          </a:bodyPr>
-          <a:lstStyle/>
-          <a:p>
-            <a:pPr algn="ctr">
-              <a:spcAft>
-                <a:spcPts val="0"/>
-              </a:spcAft>
-            </a:pPr>
-            <a:r>
-              <a:rPr sz="1000" b="0">
-                <a:solidFill>
-                  <a:srgbClr val="6E6E6E"/>
-                </a:solidFill>
-                <a:latin typeface="Arial"/>
-              </a:rPr>
-              <a:t>S5 field envelopes: centre + YAN-extreme beams clear every mirror at the instrument's own 10/5 mm spec.</a:t>
-            </a:r>
-          </a:p>
-        </p:txBody>
-      </p:sp>
-      <p:sp>
-        <p:nvSpPr>
-          <p:cNvPr id="10" name="TextBox 9"/>
-          <p:cNvSpPr txBox="1"/>
-          <p:nvPr/>
-        </p:nvSpPr>
-        <p:spPr>
-          <a:xfrm>
-            <a:off x="6400800" y="6137818"/>
+            <a:off x="6400800" y="5376672"/>
             <a:ext cx="5394960" cy="274320"/>
           </a:xfrm>
           <a:prstGeom prst="rect">
@@ -7786,7 +7367,7 @@
                 </a:solidFill>
                 <a:latin typeface="Arial"/>
               </a:rPr>
-              <a:t>strict RMS WFE, centroid reference on the stage's frozen focal plane, exit-pupil anchor, piston-only removal; quoted statistic = dense 11x11 map MAXIMUM over the field box (this instrument's box).  Reproduce: rodgers3() = the Stage-0 gates, oi_story(...) = ladder + counters; record: challenges/rodgers3/PACKET.md.</a:t>
+              <a:t>strict RMS WFE, centroid reference on the stage's frozen focal plane, exit-pupil anchor, piston-only removal; quoted statistic = dense 11x11 map MAXIMUM over the field box (slides 1–7).  Reproduce: rodgers3() = the Stage-0 gates, oi_story(...) = ladder + counters, run_s5_budget()/run_s5_signed() = the slide-6 probes; record: challenges/rodgers3/PACKET.md incl. the 2026-08-21 addendum.</a:t>
             </a:r>
           </a:p>
         </p:txBody>

--- a/mmacos/challenges/rodgers3/deck_rodgers3.pptx
+++ b/mmacos/challenges/rodgers3/deck_rodgers3.pptx
@@ -7268,6 +7268,22 @@
               <a:t>•  The second instrument (EPD 200 mm, F/2.5) exposed all of it and is retired for re-instancing; its layout figure — not a number — is what caught the defect.</a:t>
             </a:r>
           </a:p>
+          <a:p>
+            <a:pPr>
+              <a:spcAft>
+                <a:spcPts val="600"/>
+              </a:spcAft>
+            </a:pPr>
+            <a:r>
+              <a:rPr sz="1200" b="0">
+                <a:solidFill>
+                  <a:srgbClr val="282828"/>
+                </a:solidFill>
+                <a:latin typeface="Arial"/>
+              </a:rPr>
+              <a:t>•  And the lessons COMPILE: the continuation runner distilled from this arc (oi_walk — solve an easy field box, then walk it open with warm starts) lands a fresh, harder instance at 69.8 nm unattended, 8531x better than its cold start (the full experiment: companion deck, section F).</a:t>
+            </a:r>
+          </a:p>
         </p:txBody>
       </p:sp>
       <p:pic>
